--- a/slides/05-soan-thao-van-ban.en.pptx
+++ b/slides/05-soan-thao-van-ban.en.pptx
@@ -632,6 +632,22 @@
               <a:t>• Nhấn: tờ trình phải có SỐ LIỆU và DỰ TOÁN, nếu không cấp trên không có cơ sở duyệt.</a:t>
             </a:r>
           </a:p>
+          <a:p/>
+          <a:p>
+            <a:r>
+              <a:t>NÓI ĐỦ Ý (phần đã rút khỏi slide)</a:t>
+            </a:r>
+          </a:p>
+          <a:p>
+            <a:r>
+              <a:t>• Quyết định: phần căn cứ gồm căn cứ PHÁP LÝ và căn cứ THỰC TIỄN, mỗi căn cứ kết thúc bằng dấu chấm phẩy, căn cứ cuối kết thúc bằng dấu chấm. Điều cuối ghi hiệu lực và đối tượng thi hành.</a:t>
+            </a:r>
+          </a:p>
+          <a:p>
+            <a:r>
+              <a:t>• Tờ trình: mở đầu nêu lý do và sự cần thiết; nội dung trình bày phương án, lợi ích, tính khả thi; kết thúc kiến nghị phê duyệt. Nhớ đính kèm hồ sơ, dự toán.</a:t>
+            </a:r>
+          </a:p>
         </p:txBody>
       </p:sp>
       <p:sp>
@@ -733,6 +749,27 @@
               <a:t>• Báo cáo: mạch 4 phần. Nhấn: phải nêu cả HẠN CHẾ, đừng chỉ kể thành tích.</a:t>
             </a:r>
           </a:p>
+          <a:p/>
+          <a:p>
+            <a:r>
+              <a:t>NÓI ĐỦ Ý (phần đã rút khỏi slide)</a:t>
+            </a:r>
+          </a:p>
+          <a:p>
+            <a:r>
+              <a:t>• Công văn các loại: đề nghị, phúc đáp, đôn đốc, hướng dẫn, giải thích, mời họp. Kết thúc bằng “Trân trọng./.”</a:t>
+            </a:r>
+          </a:p>
+          <a:p>
+            <a:r>
+              <a:t>• Biên bản: chữ ký các bên là yếu tố TẠO GIÁ TRỊ PHÁP LÝ — thiếu chữ ký thì biên bản chỉ là tờ giấy ghi chép.</a:t>
+            </a:r>
+          </a:p>
+          <a:p>
+            <a:r>
+              <a:t>• Báo cáo có bốn dạng: định kỳ, đột xuất, chuyên đề, sơ kết – tổng kết.</a:t>
+            </a:r>
+          </a:p>
         </p:txBody>
       </p:sp>
       <p:sp>
@@ -834,6 +871,32 @@
               <a:t>• Báo giá: nhấn mạnh THỜI HẠN HIỆU LỰC. Hỏi lớp vì sao cần — vì giá thị trường biến động, tránh bị ràng buộc giá cũ.</a:t>
             </a:r>
           </a:p>
+          <a:p/>
+          <a:p>
+            <a:r>
+              <a:t>NÓI ĐỦ Ý (phần đã rút khỏi slide)</a:t>
+            </a:r>
+          </a:p>
+          <a:p>
+            <a:r>
+              <a:t>• Nguyên tắc 5C: Clear (rõ) • Concise (gọn) • Correct (đúng) • Complete (đủ) • Courteous (lịch sự).</a:t>
+            </a:r>
+          </a:p>
+          <a:p>
+            <a:r>
+              <a:t>• Kết cấu thư: mở đầu – nội dung – kết thúc.</a:t>
+            </a:r>
+          </a:p>
+          <a:p>
+            <a:r>
+              <a:t>• Báo giá phải có THỜI HẠN HIỆU LỰC — thiếu là tranh chấp khi giá thị trường biến động.</a:t>
+            </a:r>
+          </a:p>
+          <a:p>
+            <a:r>
+              <a:t>• Email: phản hồi trong 24 giờ, kể cả khi chỉ để báo “đã nhận, đang xử lý”.</a:t>
+            </a:r>
+          </a:p>
         </p:txBody>
       </p:sp>
       <p:sp>
@@ -940,6 +1003,32 @@
               <a:t>• Câu chốt: "Đủ bộ ba này thì hồ sơ thương vụ mới trọn vẹn về pháp lý."''</a:t>
             </a:r>
           </a:p>
+          <a:p/>
+          <a:p>
+            <a:r>
+              <a:t>NÓI ĐỦ Ý (phần đã rút khỏi slide)</a:t>
+            </a:r>
+          </a:p>
+          <a:p>
+            <a:r>
+              <a:t>• Hợp đồng thương mại căn cứ Bộ luật Dân sự 2015 và Luật Thương mại 2005.</a:t>
+            </a:r>
+          </a:p>
+          <a:p>
+            <a:r>
+              <a:t>• Bộ ba khép kín một thương vụ: hợp đồng → biên bản nghiệm thu → biên bản thanh lý.</a:t>
+            </a:r>
+          </a:p>
+          <a:p>
+            <a:r>
+              <a:t>• Nghiệm thu xác nhận khối lượng và chất lượng, là căn cứ để thanh toán.</a:t>
+            </a:r>
+          </a:p>
+          <a:p>
+            <a:r>
+              <a:t>• Thanh lý xác nhận hoàn thành nghĩa vụ và quyết toán phần còn lại.</a:t>
+            </a:r>
+          </a:p>
         </p:txBody>
       </p:sp>
       <p:sp>
@@ -1887,6 +1976,27 @@
               <a:t>• Vai trò: nhấn "căn cứ pháp lý" — cho ví dụ tranh chấp hợp đồng ra tòa, cái tòa xem là VĂN BẢN.</a:t>
             </a:r>
           </a:p>
+          <a:p/>
+          <a:p>
+            <a:r>
+              <a:t>NÓI ĐỦ Ý (phần đã rút khỏi slide)</a:t>
+            </a:r>
+          </a:p>
+          <a:p>
+            <a:r>
+              <a:t>• Định nghĩa pháp lý đầy đủ, Nghị định 30/2020/NĐ-CP: “Văn bản là thông tin thành văn được truyền đạt bằng ngôn ngữ hoặc ký hiệu, hình thành trong hoạt động của các cơ quan, tổ chức và được trình bày đúng thể thức, kỹ thuật theo quy định.”</a:t>
+            </a:r>
+          </a:p>
+          <a:p>
+            <a:r>
+              <a:t>• Cách hiểu chung: hình thành trong hoạt động của cơ quan, tổ chức, DOANH NGHIỆP — không chỉ cơ quan nhà nước.</a:t>
+            </a:r>
+          </a:p>
+          <a:p>
+            <a:r>
+              <a:t>• Bốn vai trò: phương tiện quản lý – điều hành; căn cứ pháp lý; lưu trữ thông tin; thể hiện hình ảnh chuyên nghiệp của tổ chức.</a:t>
+            </a:r>
+          </a:p>
         </p:txBody>
       </p:sp>
       <p:sp>
@@ -2089,6 +2199,32 @@
               <a:t>• Yêu cầu 4: đọc vài câu KHẨU NGỮ sai chuẩn cho lớp nhận diện ("mong anh chị thông cảm giúp em nha").</a:t>
             </a:r>
           </a:p>
+          <a:p/>
+          <a:p>
+            <a:r>
+              <a:t>NÓI ĐỦ Ý (phần đã rút khỏi slide)</a:t>
+            </a:r>
+          </a:p>
+          <a:p>
+            <a:r>
+              <a:t>• Đúng mục đích: mỗi văn bản tập trung MỘT chủ đề; ban hành đúng chức năng, nhiệm vụ.</a:t>
+            </a:r>
+          </a:p>
+          <a:p>
+            <a:r>
+              <a:t>• Chính xác: một con số sai có thể tạo hậu quả pháp lý lớn — nhấn mạnh chỗ này cho sinh viên.</a:t>
+            </a:r>
+          </a:p>
+          <a:p>
+            <a:r>
+              <a:t>• Rõ ràng: người nhận đọc MỘT LẦN là hiểu đúng ý người soạn.</a:t>
+            </a:r>
+          </a:p>
+          <a:p>
+            <a:r>
+              <a:t>• Ngôn ngữ hành chính: nghiêm túc, lịch sự, không khẩu ngữ.</a:t>
+            </a:r>
+          </a:p>
         </p:txBody>
       </p:sp>
       <p:sp>
@@ -2304,6 +2440,32 @@
           <a:p>
             <a:r>
               <a:t>• Số trang: TỪ TRANG THỨ HAI, canh giữa LỀ TRÊN (nhiều bạn hay đặt ở dưới — sai).</a:t>
+            </a:r>
+          </a:p>
+          <a:p/>
+          <a:p>
+            <a:r>
+              <a:t>NÓI ĐỦ Ý (phần đã rút khỏi slide)</a:t>
+            </a:r>
+          </a:p>
+          <a:p>
+            <a:r>
+              <a:t>• Lề trái 30–35 mm rộng hơn vì phải chừa chỗ ĐÓNG GÁY.</a:t>
+            </a:r>
+          </a:p>
+          <a:p>
+            <a:r>
+              <a:t>• Phông Times New Roman, bộ mã Unicode, cỡ 13–14, màu đen.</a:t>
+            </a:r>
+          </a:p>
+          <a:p>
+            <a:r>
+              <a:t>• Số trang: đánh từ trang THỨ HAI, chữ số Ả Rập, canh giữa theo lề trên.</a:t>
+            </a:r>
+          </a:p>
+          <a:p>
+            <a:r>
+              <a:t>• Ngôn ngữ: viết hoa và viết tắt phải đúng quy định; số liệu dùng chữ số Ả Rập.</a:t>
             </a:r>
           </a:p>
         </p:txBody>
@@ -2802,7 +2964,7 @@
       </p:sp>
       <p:pic>
         <p:nvPicPr>
-          <p:cNvPr id="3" name="Image 0" descr="assets/logo_tron.png">    </p:cNvPr>
+          <p:cNvPr id="3" name="Image 0" descr="/home/user/comdraft/assets/img/dau-huong.png">    </p:cNvPr>
           <p:cNvPicPr>
             <a:picLocks noChangeAspect="1"/>
           </p:cNvPicPr>
@@ -2828,7 +2990,7 @@
       </p:pic>
       <p:pic>
         <p:nvPicPr>
-          <p:cNvPr id="4" name="Image 1" descr="assets/logo_ngang.png">    </p:cNvPr>
+          <p:cNvPr id="4" name="Image 1" descr="/home/user/comdraft/assets/img/lockup-huong.png">    </p:cNvPr>
           <p:cNvPicPr>
             <a:picLocks noChangeAspect="1"/>
           </p:cNvPicPr>
@@ -3058,7 +3220,7 @@
                 <a:ea typeface="Calibri" pitchFamily="34" charset="-122"/>
                 <a:cs typeface="Calibri" pitchFamily="34" charset="-120"/>
               </a:rPr>
-              <a:t>EC6000TX – Business Communication and Negotiation Skills (Distance Learning)</a:t>
+              <a:t>EC1103 – Business Communication and Document Drafting Skills (2:1)  •  Class 261b, Semester 1, 2026 – 2027</a:t>
             </a:r>
             <a:endParaRPr lang="en-US" sz="1500" dirty="0"/>
           </a:p>
@@ -3097,7 +3259,7 @@
                 <a:ea typeface="Calibri" pitchFamily="34" charset="-122"/>
                 <a:cs typeface="Calibri" pitchFamily="34" charset="-120"/>
               </a:rPr>
-              <a:t>© Đỗ Thùy Hương, 2026 — Lecture prepared for the distance-learning class. Please credit the source when reused.</a:t>
+              <a:t>© Đỗ Thùy Hương, 2026 — Lecture prepared for the in-person class. Please credit the source when reused.</a:t>
             </a:r>
             <a:endParaRPr lang="en-US" sz="900" dirty="0"/>
           </a:p>
@@ -3683,7 +3845,7 @@
                 </a:solidFill>
                 <a:latin typeface="Calibri"/>
               </a:rPr>
-              <a:t>Je m'appelle Huong  •  Instructor Đỗ Thùy Hương  •  EC6000TX</a:t>
+              <a:t>Je m'appelle Huong  •  Instructor Đỗ Thùy Hương  •  EC1103</a:t>
             </a:r>
           </a:p>
         </p:txBody>
@@ -4004,7 +4166,7 @@
                 </a:solidFill>
                 <a:latin typeface="Calibri"/>
               </a:rPr>
-              <a:t>Je m'appelle Huong  •  Instructor Đỗ Thùy Hương  •  EC6000TX</a:t>
+              <a:t>Je m'appelle Huong  •  Instructor Đỗ Thùy Hương  •  EC1103</a:t>
             </a:r>
           </a:p>
         </p:txBody>
@@ -4078,7 +4240,7 @@
       </p:grpSpPr>
       <p:pic>
         <p:nvPicPr>
-          <p:cNvPr id="2" name="Image 0" descr="assets/logo_tron.png">    </p:cNvPr>
+          <p:cNvPr id="2" name="Image 0" descr="/home/user/comdraft/assets/img/dau-huong.png">    </p:cNvPr>
           <p:cNvPicPr>
             <a:picLocks noChangeAspect="1"/>
           </p:cNvPicPr>
@@ -4133,7 +4295,7 @@
                 <a:ea typeface="Calibri" pitchFamily="34" charset="-122"/>
                 <a:cs typeface="Calibri" pitchFamily="34" charset="-120"/>
               </a:rPr>
-              <a:t>Je m'appelle Huong  •  Instructor Đỗ Thùy Hương  •  EC6000TX</a:t>
+              <a:t>Je m'appelle Huong  •  Instructor Đỗ Thùy Hương  •  EC1103</a:t>
             </a:r>
             <a:endParaRPr lang="en-US" sz="900" dirty="0"/>
           </a:p>
@@ -4335,7 +4497,7 @@
         </p:blipFill>
         <p:spPr>
           <a:xfrm>
-            <a:off x="981171" y="1481328"/>
+            <a:off x="981171" y="2365438"/>
             <a:ext cx="10229353" cy="2940939"/>
           </a:xfrm>
           <a:prstGeom prst="rect">
@@ -4351,7 +4513,7 @@
         </p:nvSpPr>
         <p:spPr>
           <a:xfrm>
-            <a:off x="548640" y="4495419"/>
+            <a:off x="548640" y="5379529"/>
             <a:ext cx="11109960" cy="310896"/>
           </a:xfrm>
           <a:prstGeom prst="rect">
@@ -4412,7 +4574,7 @@
       </p:grpSpPr>
       <p:pic>
         <p:nvPicPr>
-          <p:cNvPr id="2" name="Image 0" descr="assets/logo_tron.png">    </p:cNvPr>
+          <p:cNvPr id="2" name="Image 0" descr="/home/user/comdraft/assets/img/dau-huong.png">    </p:cNvPr>
           <p:cNvPicPr>
             <a:picLocks noChangeAspect="1"/>
           </p:cNvPicPr>
@@ -4467,7 +4629,7 @@
                 <a:ea typeface="Calibri" pitchFamily="34" charset="-122"/>
                 <a:cs typeface="Calibri" pitchFamily="34" charset="-120"/>
               </a:rPr>
-              <a:t>Je m'appelle Huong  •  Instructor Đỗ Thùy Hương  •  EC6000TX</a:t>
+              <a:t>Je m'appelle Huong  •  Instructor Đỗ Thùy Hương  •  EC1103</a:t>
             </a:r>
             <a:endParaRPr lang="en-US" sz="900" dirty="0"/>
           </a:p>
@@ -4821,7 +4983,7 @@
                 <a:ea typeface="Calibri" pitchFamily="34" charset="-122"/>
                 <a:cs typeface="Calibri" pitchFamily="34" charset="-120"/>
               </a:rPr>
-              <a:t>The grounds section (legal + practical, ending with a full stop) → the content, organised into Articles. The final Article states the effective date and who must comply.</a:t>
+              <a:t>The grounds → the substance in Articles → the last Article states when it takes effect</a:t>
             </a:r>
             <a:endParaRPr lang="en-US" sz="1500" dirty="0"/>
           </a:p>
@@ -4908,7 +5070,7 @@
                 <a:ea typeface="Calibri" pitchFamily="34" charset="-122"/>
                 <a:cs typeface="Calibri" pitchFamily="34" charset="-120"/>
               </a:rPr>
-              <a:t>A document proposing that a competent authority approve a policy, plan, project or course of action.</a:t>
+              <a:t>Asking the competent level to approve a policy or a plan</a:t>
             </a:r>
             <a:endParaRPr lang="en-US" sz="1500" dirty="0"/>
           </a:p>
@@ -4995,7 +5157,7 @@
                 <a:ea typeface="Calibri" pitchFamily="34" charset="-122"/>
                 <a:cs typeface="Calibri" pitchFamily="34" charset="-120"/>
               </a:rPr>
-              <a:t>Opening: reason and necessity → Content: the plan, its benefits and feasibility → Closing: a request for approval. Dossiers and cost estimates are attached.</a:t>
+              <a:t>The reason → the plan and its benefits → the request for approval</a:t>
             </a:r>
             <a:endParaRPr lang="en-US" sz="1500" dirty="0"/>
           </a:p>
@@ -5035,7 +5197,7 @@
       </p:grpSpPr>
       <p:pic>
         <p:nvPicPr>
-          <p:cNvPr id="2" name="Image 0" descr="assets/logo_tron.png">    </p:cNvPr>
+          <p:cNvPr id="2" name="Image 0" descr="/home/user/comdraft/assets/img/dau-huong.png">    </p:cNvPr>
           <p:cNvPicPr>
             <a:picLocks noChangeAspect="1"/>
           </p:cNvPicPr>
@@ -5090,7 +5252,7 @@
                 <a:ea typeface="Calibri" pitchFamily="34" charset="-122"/>
                 <a:cs typeface="Calibri" pitchFamily="34" charset="-120"/>
               </a:rPr>
-              <a:t>Je m'appelle Huong  •  Instructor Đỗ Thùy Hương  •  EC6000TX</a:t>
+              <a:t>Je m'appelle Huong  •  Instructor Đỗ Thùy Hương  •  EC1103</a:t>
             </a:r>
             <a:endParaRPr lang="en-US" sz="900" dirty="0"/>
           </a:p>
@@ -5357,7 +5519,7 @@
                 <a:ea typeface="Calibri" pitchFamily="34" charset="-122"/>
                 <a:cs typeface="Calibri" pitchFamily="34" charset="-120"/>
               </a:rPr>
-              <a:t>Has no type name — only a number, symbol and summary. Types include: request, response, follow-up, guidance, explanation, meeting invitation. Each letter covers one topic; it closes with "Respectfully./."</a:t>
+              <a:t>No document-type heading — only number, reference and subject line. One subject each</a:t>
             </a:r>
             <a:endParaRPr lang="en-US" sz="1500" dirty="0"/>
           </a:p>
@@ -5444,7 +5606,7 @@
                 <a:ea typeface="Calibri" pitchFamily="34" charset="-122"/>
                 <a:cs typeface="Calibri" pitchFamily="34" charset="-120"/>
               </a:rPr>
-              <a:t>Recorded on the spot, truthfully and objectively. Structure: time and place → attendees → proceedings and views → conclusion → the parties' signatures (what gives it legal validity).</a:t>
+              <a:t>Written on the spot. Time – those present – proceedings – conclusion – signatures</a:t>
             </a:r>
             <a:endParaRPr lang="en-US" sz="1500" dirty="0"/>
           </a:p>
@@ -5531,7 +5693,7 @@
                 <a:ea typeface="Calibri" pitchFamily="34" charset="-122"/>
                 <a:cs typeface="Calibri" pitchFamily="34" charset="-120"/>
               </a:rPr>
-              <a:t>Periodic • ad-hoc • thematic • review/summary. A 4-part flow: the situation → results achieved → limitations and causes → direction and recommendations.</a:t>
+              <a:t>The situation → results → shortcomings and causes → the way forward</a:t>
             </a:r>
             <a:endParaRPr lang="en-US" sz="1500" dirty="0"/>
           </a:p>
@@ -5818,7 +5980,7 @@
                 </a:solidFill>
                 <a:latin typeface="Calibri"/>
               </a:rPr>
-              <a:t>Je m'appelle Huong  •  Instructor Đỗ Thùy Hương  •  EC6000TX</a:t>
+              <a:t>Je m'appelle Huong  •  Instructor Đỗ Thùy Hương  •  EC1103</a:t>
             </a:r>
           </a:p>
         </p:txBody>
@@ -5892,7 +6054,7 @@
       </p:grpSpPr>
       <p:pic>
         <p:nvPicPr>
-          <p:cNvPr id="2" name="Image 0" descr="assets/logo_tron.png">    </p:cNvPr>
+          <p:cNvPr id="2" name="Image 0" descr="/home/user/comdraft/assets/img/dau-huong.png">    </p:cNvPr>
           <p:cNvPicPr>
             <a:picLocks noChangeAspect="1"/>
           </p:cNvPicPr>
@@ -5947,7 +6109,7 @@
                 <a:ea typeface="Calibri" pitchFamily="34" charset="-122"/>
                 <a:cs typeface="Calibri" pitchFamily="34" charset="-120"/>
               </a:rPr>
-              <a:t>Je m'appelle Huong  •  Instructor Đỗ Thùy Hương  •  EC6000TX</a:t>
+              <a:t>Je m'appelle Huong  •  Instructor Đỗ Thùy Hương  •  EC1103</a:t>
             </a:r>
             <a:endParaRPr lang="en-US" sz="900" dirty="0"/>
           </a:p>
@@ -6214,7 +6376,7 @@
                 <a:ea typeface="Calibri" pitchFamily="34" charset="-122"/>
                 <a:cs typeface="Calibri" pitchFamily="34" charset="-120"/>
               </a:rPr>
-              <a:t>Inquiry, sales, order, confirmation, complaint and thank-you letters. Structure: opening – body – closing.</a:t>
+              <a:t>Enquiry • offer • order • confirmation • complaint • thanks</a:t>
             </a:r>
             <a:endParaRPr lang="en-US" sz="1500" dirty="0"/>
           </a:p>
@@ -6388,7 +6550,7 @@
                 <a:ea typeface="Calibri" pitchFamily="34" charset="-122"/>
                 <a:cs typeface="Calibri" pitchFamily="34" charset="-120"/>
               </a:rPr>
-              <a:t>A short subject line matching the content; an appropriate salutation; a signature with full details; reply within 24 hours.</a:t>
+              <a:t>A subject line that matches • a full signature block • reply within 24 hours</a:t>
             </a:r>
             <a:endParaRPr lang="en-US" sz="1500" dirty="0"/>
           </a:p>
@@ -6475,7 +6637,7 @@
                 <a:ea typeface="Calibri" pitchFamily="34" charset="-122"/>
                 <a:cs typeface="Calibri" pitchFamily="34" charset="-120"/>
               </a:rPr>
-              <a:t>Business details • description of goods • quantity, unit price, tax • delivery and payment terms • a validity period (to avoid disputes when market prices move).</a:t>
+              <a:t>The goods • quantity, unit price, tax • delivery, payment • validity period</a:t>
             </a:r>
             <a:endParaRPr lang="en-US" sz="1500" dirty="0"/>
           </a:p>
@@ -6515,7 +6677,7 @@
       </p:grpSpPr>
       <p:pic>
         <p:nvPicPr>
-          <p:cNvPr id="2" name="Image 0" descr="assets/logo_tron.png">    </p:cNvPr>
+          <p:cNvPr id="2" name="Image 0" descr="/home/user/comdraft/assets/img/dau-huong.png">    </p:cNvPr>
           <p:cNvPicPr>
             <a:picLocks noChangeAspect="1"/>
           </p:cNvPicPr>
@@ -6570,7 +6732,7 @@
                 <a:ea typeface="Calibri" pitchFamily="34" charset="-122"/>
                 <a:cs typeface="Calibri" pitchFamily="34" charset="-120"/>
               </a:rPr>
-              <a:t>Je m'appelle Huong  •  Instructor Đỗ Thùy Hương  •  EC6000TX</a:t>
+              <a:t>Je m'appelle Huong  •  Instructor Đỗ Thùy Hương  •  EC1103</a:t>
             </a:r>
             <a:endParaRPr lang="en-US" sz="900" dirty="0"/>
           </a:p>
@@ -6837,7 +6999,7 @@
                 <a:ea typeface="Calibri" pitchFamily="34" charset="-122"/>
                 <a:cs typeface="Calibri" pitchFamily="34" charset="-120"/>
               </a:rPr>
-              <a:t>Based on the 2015 Civil Code and the 2005 Commercial Law. Main clauses: subject matter; price and payment method; parties' rights and obligations; penalties; dispute resolution.</a:t>
+              <a:t>Subject matter • price and payment • rights and obligations • penalties • disputes</a:t>
             </a:r>
             <a:endParaRPr lang="en-US" sz="1500" dirty="0"/>
           </a:p>
@@ -6924,7 +7086,7 @@
                 <a:ea typeface="Calibri" pitchFamily="34" charset="-122"/>
                 <a:cs typeface="Calibri" pitchFamily="34" charset="-120"/>
               </a:rPr>
-              <a:t>Confirms the volume and quality of goods or services delivered — the basis for payment.</a:t>
+              <a:t>Confirms quantity and quality — the basis for payment</a:t>
             </a:r>
             <a:endParaRPr lang="en-US" sz="1500" dirty="0"/>
           </a:p>
@@ -7011,7 +7173,7 @@
                 <a:ea typeface="Calibri" pitchFamily="34" charset="-122"/>
                 <a:cs typeface="Calibri" pitchFamily="34" charset="-120"/>
               </a:rPr>
-              <a:t>Confirms obligations are fulfilled, terminates the contract, and settles the remaining rights and obligations.</a:t>
+              <a:t>Obligations discharged, the contract ended, the remainder settled</a:t>
             </a:r>
             <a:endParaRPr lang="en-US" sz="1500" dirty="0"/>
           </a:p>
@@ -7051,7 +7213,7 @@
       </p:grpSpPr>
       <p:pic>
         <p:nvPicPr>
-          <p:cNvPr id="2" name="Image 0" descr="assets/logo_tron.png">    </p:cNvPr>
+          <p:cNvPr id="2" name="Image 0" descr="/home/user/comdraft/assets/img/dau-huong.png">    </p:cNvPr>
           <p:cNvPicPr>
             <a:picLocks noChangeAspect="1"/>
           </p:cNvPicPr>
@@ -7106,7 +7268,7 @@
                 <a:ea typeface="Calibri" pitchFamily="34" charset="-122"/>
                 <a:cs typeface="Calibri" pitchFamily="34" charset="-120"/>
               </a:rPr>
-              <a:t>Je m'appelle Huong  •  Instructor Đỗ Thùy Hương  •  EC6000TX</a:t>
+              <a:t>Je m'appelle Huong  •  Instructor Đỗ Thùy Hương  •  EC1103</a:t>
             </a:r>
             <a:endParaRPr lang="en-US" sz="900" dirty="0"/>
           </a:p>
@@ -7782,7 +7944,7 @@
       </p:grpSpPr>
       <p:pic>
         <p:nvPicPr>
-          <p:cNvPr id="2" name="Image 0" descr="assets/logo_tron.png">    </p:cNvPr>
+          <p:cNvPr id="2" name="Image 0" descr="/home/user/comdraft/assets/img/dau-huong.png">    </p:cNvPr>
           <p:cNvPicPr>
             <a:picLocks noChangeAspect="1"/>
           </p:cNvPicPr>
@@ -7837,7 +7999,7 @@
                 <a:ea typeface="Calibri" pitchFamily="34" charset="-122"/>
                 <a:cs typeface="Calibri" pitchFamily="34" charset="-120"/>
               </a:rPr>
-              <a:t>Je m'appelle Huong  •  Instructor Đỗ Thùy Hương  •  EC6000TX</a:t>
+              <a:t>Je m'appelle Huong  •  Instructor Đỗ Thùy Hương  •  EC1103</a:t>
             </a:r>
             <a:endParaRPr lang="en-US" sz="900" dirty="0"/>
           </a:p>
@@ -8318,7 +8480,7 @@
       </p:grpSpPr>
       <p:pic>
         <p:nvPicPr>
-          <p:cNvPr id="2" name="Image 0" descr="assets/logo_tron.png">    </p:cNvPr>
+          <p:cNvPr id="2" name="Image 0" descr="/home/user/comdraft/assets/img/dau-huong.png">    </p:cNvPr>
           <p:cNvPicPr>
             <a:picLocks noChangeAspect="1"/>
           </p:cNvPicPr>
@@ -8373,7 +8535,7 @@
                 <a:ea typeface="Calibri" pitchFamily="34" charset="-122"/>
                 <a:cs typeface="Calibri" pitchFamily="34" charset="-120"/>
               </a:rPr>
-              <a:t>Je m'appelle Huong  •  Instructor Đỗ Thùy Hương  •  EC6000TX</a:t>
+              <a:t>Je m'appelle Huong  •  Instructor Đỗ Thùy Hương  •  EC1103</a:t>
             </a:r>
             <a:endParaRPr lang="en-US" sz="900" dirty="0"/>
           </a:p>
@@ -9057,7 +9219,7 @@
       </p:grpSpPr>
       <p:pic>
         <p:nvPicPr>
-          <p:cNvPr id="2" name="Image 0" descr="assets/logo_tron.png">    </p:cNvPr>
+          <p:cNvPr id="2" name="Image 0" descr="/home/user/comdraft/assets/img/dau-huong.png">    </p:cNvPr>
           <p:cNvPicPr>
             <a:picLocks noChangeAspect="1"/>
           </p:cNvPicPr>
@@ -9112,7 +9274,7 @@
                 <a:ea typeface="Calibri" pitchFamily="34" charset="-122"/>
                 <a:cs typeface="Calibri" pitchFamily="34" charset="-120"/>
               </a:rPr>
-              <a:t>Je m'appelle Huong  •  Instructor Đỗ Thùy Hương  •  EC6000TX</a:t>
+              <a:t>Je m'appelle Huong  •  Instructor Đỗ Thùy Hương  •  EC1103</a:t>
             </a:r>
             <a:endParaRPr lang="en-US" sz="900" dirty="0"/>
           </a:p>
@@ -9824,7 +9986,7 @@
       </p:grpSpPr>
       <p:pic>
         <p:nvPicPr>
-          <p:cNvPr id="2" name="Image 0" descr="assets/logo_tron.png">    </p:cNvPr>
+          <p:cNvPr id="2" name="Image 0" descr="/home/user/comdraft/assets/img/dau-huong.png">    </p:cNvPr>
           <p:cNvPicPr>
             <a:picLocks noChangeAspect="1"/>
           </p:cNvPicPr>
@@ -9879,7 +10041,7 @@
                 <a:ea typeface="Calibri" pitchFamily="34" charset="-122"/>
                 <a:cs typeface="Calibri" pitchFamily="34" charset="-120"/>
               </a:rPr>
-              <a:t>Je m'appelle Huong  •  Instructor Đỗ Thùy Hương  •  EC6000TX</a:t>
+              <a:t>Je m'appelle Huong  •  Instructor Đỗ Thùy Hương  •  EC1103</a:t>
             </a:r>
             <a:endParaRPr lang="en-US" sz="900" dirty="0"/>
           </a:p>
@@ -10360,7 +10522,7 @@
       </p:grpSpPr>
       <p:pic>
         <p:nvPicPr>
-          <p:cNvPr id="2" name="Image 0" descr="assets/logo_tron.png">    </p:cNvPr>
+          <p:cNvPr id="2" name="Image 0" descr="/home/user/comdraft/assets/img/dau-huong.png">    </p:cNvPr>
           <p:cNvPicPr>
             <a:picLocks noChangeAspect="1"/>
           </p:cNvPicPr>
@@ -10415,7 +10577,7 @@
                 <a:ea typeface="Calibri" pitchFamily="34" charset="-122"/>
                 <a:cs typeface="Calibri" pitchFamily="34" charset="-120"/>
               </a:rPr>
-              <a:t>Je m'appelle Huong  •  Instructor Đỗ Thùy Hương  •  EC6000TX</a:t>
+              <a:t>Je m'appelle Huong  •  Instructor Đỗ Thùy Hương  •  EC1103</a:t>
             </a:r>
             <a:endParaRPr lang="en-US" sz="900" dirty="0"/>
           </a:p>
@@ -11346,7 +11508,7 @@
                 </a:solidFill>
                 <a:latin typeface="Calibri"/>
               </a:rPr>
-              <a:t>Je m'appelle Huong  •  Instructor Đỗ Thùy Hương  •  EC6000TX</a:t>
+              <a:t>Je m'appelle Huong  •  Instructor Đỗ Thùy Hương  •  EC1103</a:t>
             </a:r>
           </a:p>
         </p:txBody>
@@ -11420,7 +11582,7 @@
       </p:grpSpPr>
       <p:pic>
         <p:nvPicPr>
-          <p:cNvPr id="2" name="Image 0" descr="assets/logo_tron.png">    </p:cNvPr>
+          <p:cNvPr id="2" name="Image 0" descr="/home/user/comdraft/assets/img/dau-huong.png">    </p:cNvPr>
           <p:cNvPicPr>
             <a:picLocks noChangeAspect="1"/>
           </p:cNvPicPr>
@@ -11475,7 +11637,7 @@
                 <a:ea typeface="Calibri" pitchFamily="34" charset="-122"/>
                 <a:cs typeface="Calibri" pitchFamily="34" charset="-120"/>
               </a:rPr>
-              <a:t>Je m'appelle Huong  •  Instructor Đỗ Thùy Hương  •  EC6000TX</a:t>
+              <a:t>Je m'appelle Huong  •  Instructor Đỗ Thùy Hương  •  EC1103</a:t>
             </a:r>
             <a:endParaRPr lang="en-US" sz="900" dirty="0"/>
           </a:p>
@@ -11742,7 +11904,7 @@
                 <a:ea typeface="Calibri" pitchFamily="34" charset="-122"/>
                 <a:cs typeface="Calibri" pitchFamily="34" charset="-120"/>
               </a:rPr>
-              <a:t>A document is a means of recording and conveying information through language or symbols, formed in the activities of agencies, organisations and businesses.</a:t>
+              <a:t>A means of recording and conveying information in language or signs</a:t>
             </a:r>
             <a:endParaRPr lang="en-US" sz="1500" dirty="0"/>
           </a:p>
@@ -11829,7 +11991,7 @@
                 <a:ea typeface="Calibri" pitchFamily="34" charset="-122"/>
                 <a:cs typeface="Calibri" pitchFamily="34" charset="-120"/>
               </a:rPr>
-              <a:t>"A document is written information conveyed in language or symbols, formed in the activities of agencies and organisations, and presented in the format and technique prescribed."</a:t>
+              <a:t>“Information put into writing… laid out in the prescribed form and technique.”</a:t>
             </a:r>
             <a:endParaRPr lang="en-US" sz="1500" dirty="0"/>
           </a:p>
@@ -11916,7 +12078,7 @@
                 <a:ea typeface="Calibri" pitchFamily="34" charset="-122"/>
                 <a:cs typeface="Calibri" pitchFamily="34" charset="-120"/>
               </a:rPr>
-              <a:t>A tool for management and administration • a legal basis for activities • a record of information • a reflection of the organisation's professional image.</a:t>
+              <a:t>Management • legal basis • record-keeping • the organisation's image</a:t>
             </a:r>
             <a:endParaRPr lang="en-US" sz="1500" dirty="0"/>
           </a:p>
@@ -11956,7 +12118,7 @@
       </p:grpSpPr>
       <p:pic>
         <p:nvPicPr>
-          <p:cNvPr id="2" name="Image 0" descr="assets/logo_tron.png">    </p:cNvPr>
+          <p:cNvPr id="2" name="Image 0" descr="/home/user/comdraft/assets/img/dau-huong.png">    </p:cNvPr>
           <p:cNvPicPr>
             <a:picLocks noChangeAspect="1"/>
           </p:cNvPicPr>
@@ -12011,7 +12173,7 @@
                 <a:ea typeface="Calibri" pitchFamily="34" charset="-122"/>
                 <a:cs typeface="Calibri" pitchFamily="34" charset="-120"/>
               </a:rPr>
-              <a:t>Je m'appelle Huong  •  Instructor Đỗ Thùy Hương  •  EC6000TX</a:t>
+              <a:t>Je m'appelle Huong  •  Instructor Đỗ Thùy Hương  •  EC1103</a:t>
             </a:r>
             <a:endParaRPr lang="en-US" sz="900" dirty="0"/>
           </a:p>
@@ -12197,351 +12359,62 @@
           </a:p>
         </p:txBody>
       </p:sp>
-      <p:sp>
-        <p:nvSpPr>
-          <p:cNvPr id="9" name="Shape 6"/>
-          <p:cNvSpPr/>
-          <p:nvPr/>
-        </p:nvSpPr>
-        <p:spPr>
-          <a:xfrm>
-            <a:off x="502920" y="1417320"/>
-            <a:ext cx="5509260" cy="2308860"/>
-          </a:xfrm>
-          <a:prstGeom prst="roundRect">
-            <a:avLst>
-              <a:gd name="adj" fmla="val 3564"/>
-            </a:avLst>
-          </a:prstGeom>
-          <a:solidFill>
-            <a:srgbClr val="FDF1EF"/>
-          </a:solidFill>
-          <a:ln w="15875">
-            <a:solidFill>
-              <a:srgbClr val="FBCEC9"/>
-            </a:solidFill>
-            <a:prstDash val="solid"/>
-          </a:ln>
-        </p:spPr>
-        <p:txBody>
-          <a:bodyPr/>
-          <a:p/>
-        </p:txBody>
-      </p:sp>
-      <p:sp>
-        <p:nvSpPr>
-          <p:cNvPr id="10" name="Text 7"/>
-          <p:cNvSpPr/>
-          <p:nvPr/>
-        </p:nvSpPr>
-        <p:spPr>
-          <a:xfrm>
-            <a:off x="722376" y="1490472"/>
-            <a:ext cx="5070348" cy="2162556"/>
-          </a:xfrm>
-          <a:prstGeom prst="rect">
-            <a:avLst/>
-          </a:prstGeom>
-          <a:noFill/>
-          <a:ln/>
-        </p:spPr>
-        <p:txBody>
-          <a:bodyPr wrap="square" lIns="0" tIns="0" rIns="0" bIns="0" rtlCol="0" anchor="ctr"/>
-          <a:lstStyle/>
-          <a:p>
-            <a:pPr indent="0" marL="0">
-              <a:buNone/>
-            </a:pPr>
-            <a:r>
-              <a:rPr lang="en-US" sz="1500" b="1" dirty="0">
-                <a:solidFill>
-                  <a:srgbClr val="AC4D33"/>
-                </a:solidFill>
-                <a:latin typeface="Calibri" pitchFamily="34" charset="0"/>
-                <a:ea typeface="Calibri" pitchFamily="34" charset="-122"/>
-                <a:cs typeface="Calibri" pitchFamily="34" charset="-120"/>
-              </a:rPr>
-              <a:t>Legal normative documents</a:t>
-            </a:r>
-            <a:endParaRPr lang="en-US" sz="1500" dirty="0"/>
-          </a:p>
-          <a:p>
-            <a:pPr indent="0" marL="0">
-              <a:buNone/>
-            </a:pPr>
-            <a:r>
-              <a:rPr lang="en-US" sz="1250" dirty="0">
-                <a:solidFill>
-                  <a:srgbClr val="3A2B28"/>
-                </a:solidFill>
-                <a:latin typeface="Calibri" pitchFamily="34" charset="0"/>
-                <a:ea typeface="Calibri" pitchFamily="34" charset="-122"/>
-                <a:cs typeface="Calibri" pitchFamily="34" charset="-120"/>
-              </a:rPr>
-              <a:t>Contain general rules of conduct, issued by a competent state agency: laws, decrees, circulars. Businesses don't issue these but must comply with them.</a:t>
-            </a:r>
-            <a:endParaRPr lang="en-US" sz="1500" dirty="0"/>
-          </a:p>
-        </p:txBody>
-      </p:sp>
-      <p:sp>
-        <p:nvSpPr>
-          <p:cNvPr id="11" name="Shape 8"/>
-          <p:cNvSpPr/>
-          <p:nvPr/>
-        </p:nvSpPr>
-        <p:spPr>
-          <a:xfrm>
-            <a:off x="6195060" y="1417320"/>
-            <a:ext cx="5509260" cy="2308860"/>
-          </a:xfrm>
-          <a:prstGeom prst="roundRect">
-            <a:avLst>
-              <a:gd name="adj" fmla="val 3564"/>
-            </a:avLst>
-          </a:prstGeom>
-          <a:solidFill>
-            <a:srgbClr val="FDF1EF"/>
-          </a:solidFill>
-          <a:ln w="15875">
-            <a:solidFill>
-              <a:srgbClr val="FBCEC9"/>
-            </a:solidFill>
-            <a:prstDash val="solid"/>
-          </a:ln>
-        </p:spPr>
-        <p:txBody>
-          <a:bodyPr/>
-          <a:p/>
-        </p:txBody>
-      </p:sp>
-      <p:sp>
-        <p:nvSpPr>
-          <p:cNvPr id="12" name="Text 9"/>
-          <p:cNvSpPr/>
-          <p:nvPr/>
-        </p:nvSpPr>
-        <p:spPr>
-          <a:xfrm>
-            <a:off x="6414516" y="1490472"/>
-            <a:ext cx="5070348" cy="2162556"/>
-          </a:xfrm>
-          <a:prstGeom prst="rect">
-            <a:avLst/>
-          </a:prstGeom>
-          <a:noFill/>
-          <a:ln/>
-        </p:spPr>
-        <p:txBody>
-          <a:bodyPr wrap="square" lIns="0" tIns="0" rIns="0" bIns="0" rtlCol="0" anchor="ctr"/>
-          <a:lstStyle/>
-          <a:p>
-            <a:pPr indent="0" marL="0">
-              <a:buNone/>
-            </a:pPr>
-            <a:r>
-              <a:rPr lang="en-US" sz="1500" b="1" dirty="0">
-                <a:solidFill>
-                  <a:srgbClr val="AC4D33"/>
-                </a:solidFill>
-                <a:latin typeface="Calibri" pitchFamily="34" charset="0"/>
-                <a:ea typeface="Calibri" pitchFamily="34" charset="-122"/>
-                <a:cs typeface="Calibri" pitchFamily="34" charset="-120"/>
-              </a:rPr>
-              <a:t>Administrative documents</a:t>
-            </a:r>
-            <a:endParaRPr lang="en-US" sz="1500" dirty="0"/>
-          </a:p>
-          <a:p>
-            <a:pPr indent="0" marL="0">
-              <a:buNone/>
-            </a:pPr>
-            <a:r>
-              <a:rPr lang="en-US" sz="1250" dirty="0">
-                <a:solidFill>
-                  <a:srgbClr val="3A2B28"/>
-                </a:solidFill>
-                <a:latin typeface="Calibri" pitchFamily="34" charset="0"/>
-                <a:ea typeface="Calibri" pitchFamily="34" charset="-122"/>
-                <a:cs typeface="Calibri" pitchFamily="34" charset="-120"/>
-              </a:rPr>
-              <a:t>The most common type — 29 types under Decree 30/2020: individual decisions, official letters, notices, reports, proposals, minutes…</a:t>
-            </a:r>
-            <a:endParaRPr lang="en-US" sz="1500" dirty="0"/>
-          </a:p>
-        </p:txBody>
-      </p:sp>
-      <p:sp>
-        <p:nvSpPr>
-          <p:cNvPr id="13" name="Shape 10"/>
-          <p:cNvSpPr/>
-          <p:nvPr/>
-        </p:nvSpPr>
-        <p:spPr>
-          <a:xfrm>
-            <a:off x="502920" y="3909060"/>
-            <a:ext cx="5509260" cy="2308860"/>
-          </a:xfrm>
-          <a:prstGeom prst="roundRect">
-            <a:avLst>
-              <a:gd name="adj" fmla="val 3564"/>
-            </a:avLst>
-          </a:prstGeom>
-          <a:solidFill>
-            <a:srgbClr val="FDF1EF"/>
-          </a:solidFill>
-          <a:ln w="15875">
-            <a:solidFill>
-              <a:srgbClr val="FBCEC9"/>
-            </a:solidFill>
-            <a:prstDash val="solid"/>
-          </a:ln>
-        </p:spPr>
-        <p:txBody>
-          <a:bodyPr/>
-          <a:p/>
-        </p:txBody>
-      </p:sp>
-      <p:sp>
-        <p:nvSpPr>
-          <p:cNvPr id="14" name="Text 11"/>
-          <p:cNvSpPr/>
-          <p:nvPr/>
-        </p:nvSpPr>
-        <p:spPr>
-          <a:xfrm>
-            <a:off x="722376" y="3982212"/>
-            <a:ext cx="5070348" cy="2162556"/>
-          </a:xfrm>
-          <a:prstGeom prst="rect">
-            <a:avLst/>
-          </a:prstGeom>
-          <a:noFill/>
-          <a:ln/>
-        </p:spPr>
-        <p:txBody>
-          <a:bodyPr wrap="square" lIns="0" tIns="0" rIns="0" bIns="0" rtlCol="0" anchor="ctr"/>
-          <a:lstStyle/>
-          <a:p>
-            <a:pPr indent="0" marL="0">
-              <a:buNone/>
-            </a:pPr>
-            <a:r>
-              <a:rPr lang="en-US" sz="1500" b="1" dirty="0">
-                <a:solidFill>
-                  <a:srgbClr val="AC4D33"/>
-                </a:solidFill>
-                <a:latin typeface="Calibri" pitchFamily="34" charset="0"/>
-                <a:ea typeface="Calibri" pitchFamily="34" charset="-122"/>
-                <a:cs typeface="Calibri" pitchFamily="34" charset="-120"/>
-              </a:rPr>
-              <a:t>Specialised documents</a:t>
-            </a:r>
-            <a:endParaRPr lang="en-US" sz="1500" dirty="0"/>
-          </a:p>
-          <a:p>
-            <a:pPr indent="0" marL="0">
-              <a:buNone/>
-            </a:pPr>
-            <a:r>
-              <a:rPr lang="en-US" sz="1250" dirty="0">
-                <a:solidFill>
-                  <a:srgbClr val="3A2B28"/>
-                </a:solidFill>
-                <a:latin typeface="Calibri" pitchFamily="34" charset="0"/>
-                <a:ea typeface="Calibri" pitchFamily="34" charset="-122"/>
-                <a:cs typeface="Calibri" pitchFamily="34" charset="-120"/>
-              </a:rPr>
-              <a:t>Formed within specific professional practice: accounting vouchers, technical dossiers, bidding dossiers.</a:t>
-            </a:r>
-            <a:endParaRPr lang="en-US" sz="1500" dirty="0"/>
-          </a:p>
-        </p:txBody>
-      </p:sp>
-      <p:sp>
-        <p:nvSpPr>
-          <p:cNvPr id="15" name="Shape 12"/>
-          <p:cNvSpPr/>
-          <p:nvPr/>
-        </p:nvSpPr>
-        <p:spPr>
-          <a:xfrm>
-            <a:off x="6195060" y="3909060"/>
-            <a:ext cx="5509260" cy="2308860"/>
-          </a:xfrm>
-          <a:prstGeom prst="roundRect">
-            <a:avLst>
-              <a:gd name="adj" fmla="val 3564"/>
-            </a:avLst>
-          </a:prstGeom>
-          <a:solidFill>
-            <a:srgbClr val="FDF1EF"/>
-          </a:solidFill>
-          <a:ln w="15875">
-            <a:solidFill>
-              <a:srgbClr val="FBCEC9"/>
-            </a:solidFill>
-            <a:prstDash val="solid"/>
-          </a:ln>
-        </p:spPr>
-        <p:txBody>
-          <a:bodyPr/>
-          <a:p/>
-        </p:txBody>
-      </p:sp>
-      <p:sp>
-        <p:nvSpPr>
-          <p:cNvPr id="16" name="Text 13"/>
-          <p:cNvSpPr/>
-          <p:nvPr/>
-        </p:nvSpPr>
-        <p:spPr>
-          <a:xfrm>
-            <a:off x="6414516" y="3982212"/>
-            <a:ext cx="5070348" cy="2162556"/>
-          </a:xfrm>
-          <a:prstGeom prst="rect">
-            <a:avLst/>
-          </a:prstGeom>
-          <a:noFill/>
-          <a:ln/>
-        </p:spPr>
-        <p:txBody>
-          <a:bodyPr wrap="square" lIns="0" tIns="0" rIns="0" bIns="0" rtlCol="0" anchor="ctr"/>
-          <a:lstStyle/>
-          <a:p>
-            <a:pPr indent="0" marL="0">
-              <a:buNone/>
-            </a:pPr>
-            <a:r>
-              <a:rPr lang="en-US" sz="1500" b="1" dirty="0">
-                <a:solidFill>
-                  <a:srgbClr val="AC4D33"/>
-                </a:solidFill>
-                <a:latin typeface="Calibri" pitchFamily="34" charset="0"/>
-                <a:ea typeface="Calibri" pitchFamily="34" charset="-122"/>
-                <a:cs typeface="Calibri" pitchFamily="34" charset="-120"/>
-              </a:rPr>
-              <a:t>Commercial documents</a:t>
-            </a:r>
-            <a:endParaRPr lang="en-US" sz="1500" dirty="0"/>
-          </a:p>
-          <a:p>
-            <a:pPr indent="0" marL="0">
-              <a:buNone/>
-            </a:pPr>
-            <a:r>
-              <a:rPr lang="en-US" sz="1250" dirty="0">
-                <a:solidFill>
-                  <a:srgbClr val="3A2B28"/>
-                </a:solidFill>
-                <a:latin typeface="Calibri" pitchFamily="34" charset="0"/>
-                <a:ea typeface="Calibri" pitchFamily="34" charset="-122"/>
-                <a:cs typeface="Calibri" pitchFamily="34" charset="-120"/>
-              </a:rPr>
-              <a:t>Serving business transactions: commercial correspondence, quotations, purchase orders, contracts — covered in detail in section 5.4.</a:t>
-            </a:r>
-            <a:endParaRPr lang="en-US" sz="1500" dirty="0"/>
+      <p:pic>
+        <p:nvPicPr>
+          <p:cNvPr id="9" name="Picture 8" descr="c5-phan-loai-van-ban-nt.png"/>
+          <p:cNvPicPr>
+            <a:picLocks noChangeAspect="1"/>
+          </p:cNvPicPr>
+          <p:nvPr/>
+        </p:nvPicPr>
+        <p:blipFill>
+          <a:blip r:embed="rId4"/>
+          <a:stretch>
+            <a:fillRect/>
+          </a:stretch>
+        </p:blipFill>
+        <p:spPr>
+          <a:xfrm>
+            <a:off x="841173" y="1751850"/>
+            <a:ext cx="10509347" cy="4168114"/>
+          </a:xfrm>
+          <a:prstGeom prst="rect">
+            <a:avLst/>
+          </a:prstGeom>
+        </p:spPr>
+      </p:pic>
+      <p:sp>
+        <p:nvSpPr>
+          <p:cNvPr id="10" name="TextBox 9"/>
+          <p:cNvSpPr txBox="1"/>
+          <p:nvPr/>
+        </p:nvSpPr>
+        <p:spPr>
+          <a:xfrm>
+            <a:off x="548640" y="5993117"/>
+            <a:ext cx="11109960" cy="310896"/>
+          </a:xfrm>
+          <a:prstGeom prst="rect">
+            <a:avLst/>
+          </a:prstGeom>
+          <a:noFill/>
+        </p:spPr>
+        <p:txBody>
+          <a:bodyPr wrap="square">
+            <a:spAutoFit/>
+          </a:bodyPr>
+          <a:lstStyle/>
+          <a:p>
+            <a:pPr algn="ctr"/>
+            <a:r>
+              <a:rPr sz="1150" i="1">
+                <a:solidFill>
+                  <a:srgbClr val="8A7A76"/>
+                </a:solidFill>
+                <a:latin typeface="Calibri"/>
+              </a:rPr>
+              <a:t>Only once you know the group do you know which template to use and who may sign.</a:t>
+            </a:r>
           </a:p>
         </p:txBody>
       </p:sp>
@@ -12579,7 +12452,7 @@
       </p:grpSpPr>
       <p:pic>
         <p:nvPicPr>
-          <p:cNvPr id="2" name="Image 0" descr="assets/logo_tron.png">    </p:cNvPr>
+          <p:cNvPr id="2" name="Image 0" descr="/home/user/comdraft/assets/img/dau-huong.png">    </p:cNvPr>
           <p:cNvPicPr>
             <a:picLocks noChangeAspect="1"/>
           </p:cNvPicPr>
@@ -12634,7 +12507,7 @@
                 <a:ea typeface="Calibri" pitchFamily="34" charset="-122"/>
                 <a:cs typeface="Calibri" pitchFamily="34" charset="-120"/>
               </a:rPr>
-              <a:t>Je m'appelle Huong  •  Instructor Đỗ Thùy Hương  •  EC6000TX</a:t>
+              <a:t>Je m'appelle Huong  •  Instructor Đỗ Thùy Hương  •  EC1103</a:t>
             </a:r>
             <a:endParaRPr lang="en-US" sz="900" dirty="0"/>
           </a:p>
@@ -12901,7 +12774,7 @@
                 <a:ea typeface="Calibri" pitchFamily="34" charset="-122"/>
                 <a:cs typeface="Calibri" pitchFamily="34" charset="-120"/>
               </a:rPr>
-              <a:t>Each document focuses on one topic; it is issued within the agency's or organisation's proper function and mandate.</a:t>
+              <a:t>One subject per document, issued within your function</a:t>
             </a:r>
             <a:endParaRPr lang="en-US" sz="1450" dirty="0"/>
           </a:p>
@@ -12988,7 +12861,7 @@
                 <a:ea typeface="Calibri" pitchFamily="34" charset="-122"/>
                 <a:cs typeface="Calibri" pitchFamily="34" charset="-120"/>
               </a:rPr>
-              <a:t>Information and figures must be truthful, evidence-based and verified. A single wrong figure can create serious legal consequences.</a:t>
+              <a:t>Figures with grounds, verifiable — one wrong number carries legal consequences</a:t>
             </a:r>
             <a:endParaRPr lang="en-US" sz="1450" dirty="0"/>
           </a:p>
@@ -13075,7 +12948,7 @@
                 <a:ea typeface="Calibri" pitchFamily="34" charset="-122"/>
                 <a:cs typeface="Calibri" pitchFamily="34" charset="-120"/>
               </a:rPr>
-              <a:t>Sentences should be coherent and unambiguous; the reader should understand the drafter's intent on a single read.</a:t>
+              <a:t>One reading is enough to get the drafter's meaning</a:t>
             </a:r>
             <a:endParaRPr lang="en-US" sz="1450" dirty="0"/>
           </a:p>
@@ -13162,7 +13035,7 @@
                 <a:ea typeface="Calibri" pitchFamily="34" charset="-122"/>
                 <a:cs typeface="Calibri" pitchFamily="34" charset="-120"/>
               </a:rPr>
-              <a:t>Compliant with current regulations; a formal, polite style with no colloquial language.</a:t>
+              <a:t>In line with current rules; formal register, no colloquialisms</a:t>
             </a:r>
             <a:endParaRPr lang="en-US" sz="1450" dirty="0"/>
           </a:p>
@@ -13202,7 +13075,7 @@
       </p:grpSpPr>
       <p:pic>
         <p:nvPicPr>
-          <p:cNvPr id="2" name="Image 0" descr="assets/logo_tron.png">    </p:cNvPr>
+          <p:cNvPr id="2" name="Image 0" descr="/home/user/comdraft/assets/img/dau-huong.png">    </p:cNvPr>
           <p:cNvPicPr>
             <a:picLocks noChangeAspect="1"/>
           </p:cNvPicPr>
@@ -13257,7 +13130,7 @@
                 <a:ea typeface="Calibri" pitchFamily="34" charset="-122"/>
                 <a:cs typeface="Calibri" pitchFamily="34" charset="-120"/>
               </a:rPr>
-              <a:t>Je m'appelle Huong  •  Instructor Đỗ Thùy Hương  •  EC6000TX</a:t>
+              <a:t>Je m'appelle Huong  •  Instructor Đỗ Thùy Hương  •  EC1103</a:t>
             </a:r>
             <a:endParaRPr lang="en-US" sz="900" dirty="0"/>
           </a:p>
@@ -13459,7 +13332,7 @@
         </p:blipFill>
         <p:spPr>
           <a:xfrm>
-            <a:off x="472287" y="1481328"/>
+            <a:off x="472287" y="1595135"/>
             <a:ext cx="11247120" cy="4481544"/>
           </a:xfrm>
           <a:prstGeom prst="rect">
@@ -13501,7 +13374,7 @@
       </p:grpSpPr>
       <p:pic>
         <p:nvPicPr>
-          <p:cNvPr id="2" name="Image 0" descr="assets/logo_tron.png">    </p:cNvPr>
+          <p:cNvPr id="2" name="Image 0" descr="/home/user/comdraft/assets/img/dau-huong.png">    </p:cNvPr>
           <p:cNvPicPr>
             <a:picLocks noChangeAspect="1"/>
           </p:cNvPicPr>
@@ -13556,7 +13429,7 @@
                 <a:ea typeface="Calibri" pitchFamily="34" charset="-122"/>
                 <a:cs typeface="Calibri" pitchFamily="34" charset="-120"/>
               </a:rPr>
-              <a:t>Je m'appelle Huong  •  Instructor Đỗ Thùy Hương  •  EC6000TX</a:t>
+              <a:t>Je m'appelle Huong  •  Instructor Đỗ Thùy Hương  •  EC1103</a:t>
             </a:r>
             <a:endParaRPr lang="en-US" sz="900" dirty="0"/>
           </a:p>
@@ -13823,7 +13696,7 @@
                 <a:ea typeface="Calibri" pitchFamily="34" charset="-122"/>
                 <a:cs typeface="Calibri" pitchFamily="34" charset="-120"/>
               </a:rPr>
-              <a:t>A4 size (210 × 297 mm). Top and bottom margins: 20 – 25 mm • left margin: 30 – 35 mm (for binding) • right margin: 15 – 20 mm.</a:t>
+              <a:t>A4 • top and bottom 20–25 mm • left 30–35 mm • right 15–20 mm</a:t>
             </a:r>
             <a:endParaRPr lang="en-US" sz="1500" dirty="0"/>
           </a:p>
@@ -14084,7 +13957,7 @@
                 <a:ea typeface="Calibri" pitchFamily="34" charset="-122"/>
                 <a:cs typeface="Calibri" pitchFamily="34" charset="-120"/>
               </a:rPr>
-              <a:t>Standard Vietnamese; correct capitalisation and abbreviations; figures use Arabic numerals.</a:t>
+              <a:t>Standard Vietnamese; capitals and abbreviations per the rules</a:t>
             </a:r>
             <a:endParaRPr lang="en-US" sz="1500" dirty="0"/>
           </a:p>
@@ -14141,14 +14014,108 @@
     </a:clrScheme>
     <a:fontScheme name="Office">
       <a:majorFont>
-        <a:latin typeface="Cambria" panose="020F0302020204030204"/>
-        <a:ea typeface="Cambria"/>
-        <a:cs typeface="Cambria"/>
+        <a:latin typeface="Calibri Light" panose="020F0302020204030204"/>
+        <a:ea typeface=""/>
+        <a:cs typeface=""/>
+        <a:font script="Jpan" typeface="游ゴシック Light"/>
+        <a:font script="Hang" typeface="맑은 고딕"/>
+        <a:font script="Hans" typeface="等线 Light"/>
+        <a:font script="Hant" typeface="新細明體"/>
+        <a:font script="Arab" typeface="Times New Roman"/>
+        <a:font script="Hebr" typeface="Times New Roman"/>
+        <a:font script="Thai" typeface="Angsana New"/>
+        <a:font script="Ethi" typeface="Nyala"/>
+        <a:font script="Beng" typeface="Vrinda"/>
+        <a:font script="Gujr" typeface="Shruti"/>
+        <a:font script="Khmr" typeface="MoolBoran"/>
+        <a:font script="Knda" typeface="Tunga"/>
+        <a:font script="Guru" typeface="Raavi"/>
+        <a:font script="Cans" typeface="Euphemia"/>
+        <a:font script="Cher" typeface="Plantagenet Cherokee"/>
+        <a:font script="Yiii" typeface="Microsoft Yi Baiti"/>
+        <a:font script="Tibt" typeface="Microsoft Himalaya"/>
+        <a:font script="Thaa" typeface="MV Boli"/>
+        <a:font script="Deva" typeface="Mangal"/>
+        <a:font script="Telu" typeface="Gautami"/>
+        <a:font script="Taml" typeface="Latha"/>
+        <a:font script="Syrc" typeface="Estrangelo Edessa"/>
+        <a:font script="Orya" typeface="Kalinga"/>
+        <a:font script="Mlym" typeface="Kartika"/>
+        <a:font script="Laoo" typeface="DokChampa"/>
+        <a:font script="Sinh" typeface="Iskoola Pota"/>
+        <a:font script="Mong" typeface="Mongolian Baiti"/>
+        <a:font script="Viet" typeface="Times New Roman"/>
+        <a:font script="Uigh" typeface="Microsoft Uighur"/>
+        <a:font script="Geor" typeface="Sylfaen"/>
+        <a:font script="Armn" typeface="Arial"/>
+        <a:font script="Bugi" typeface="Leelawadee UI"/>
+        <a:font script="Bopo" typeface="Microsoft JhengHei"/>
+        <a:font script="Java" typeface="Javanese Text"/>
+        <a:font script="Lisu" typeface="Segoe UI"/>
+        <a:font script="Mymr" typeface="Myanmar Text"/>
+        <a:font script="Nkoo" typeface="Ebrima"/>
+        <a:font script="Olck" typeface="Nirmala UI"/>
+        <a:font script="Osma" typeface="Ebrima"/>
+        <a:font script="Phag" typeface="Phagspa"/>
+        <a:font script="Syrn" typeface="Estrangelo Edessa"/>
+        <a:font script="Syrj" typeface="Estrangelo Edessa"/>
+        <a:font script="Syre" typeface="Estrangelo Edessa"/>
+        <a:font script="Sora" typeface="Nirmala UI"/>
+        <a:font script="Tale" typeface="Microsoft Tai Le"/>
+        <a:font script="Talu" typeface="Microsoft New Tai Lue"/>
+        <a:font script="Tfng" typeface="Ebrima"/>
       </a:majorFont>
       <a:minorFont>
         <a:latin typeface="Calibri" panose="020F0502020204030204"/>
-        <a:ea typeface="Calibri"/>
-        <a:cs typeface="Calibri"/>
+        <a:ea typeface=""/>
+        <a:cs typeface=""/>
+        <a:font script="Jpan" typeface="游ゴシック"/>
+        <a:font script="Hang" typeface="맑은 고딕"/>
+        <a:font script="Hans" typeface="等线"/>
+        <a:font script="Hant" typeface="新細明體"/>
+        <a:font script="Arab" typeface="Arial"/>
+        <a:font script="Hebr" typeface="Arial"/>
+        <a:font script="Thai" typeface="Cordia New"/>
+        <a:font script="Ethi" typeface="Nyala"/>
+        <a:font script="Beng" typeface="Vrinda"/>
+        <a:font script="Gujr" typeface="Shruti"/>
+        <a:font script="Khmr" typeface="DaunPenh"/>
+        <a:font script="Knda" typeface="Tunga"/>
+        <a:font script="Guru" typeface="Raavi"/>
+        <a:font script="Cans" typeface="Euphemia"/>
+        <a:font script="Cher" typeface="Plantagenet Cherokee"/>
+        <a:font script="Yiii" typeface="Microsoft Yi Baiti"/>
+        <a:font script="Tibt" typeface="Microsoft Himalaya"/>
+        <a:font script="Thaa" typeface="MV Boli"/>
+        <a:font script="Deva" typeface="Mangal"/>
+        <a:font script="Telu" typeface="Gautami"/>
+        <a:font script="Taml" typeface="Latha"/>
+        <a:font script="Syrc" typeface="Estrangelo Edessa"/>
+        <a:font script="Orya" typeface="Kalinga"/>
+        <a:font script="Mlym" typeface="Kartika"/>
+        <a:font script="Laoo" typeface="DokChampa"/>
+        <a:font script="Sinh" typeface="Iskoola Pota"/>
+        <a:font script="Mong" typeface="Mongolian Baiti"/>
+        <a:font script="Viet" typeface="Arial"/>
+        <a:font script="Uigh" typeface="Microsoft Uighur"/>
+        <a:font script="Geor" typeface="Sylfaen"/>
+        <a:font script="Armn" typeface="Arial"/>
+        <a:font script="Bugi" typeface="Leelawadee UI"/>
+        <a:font script="Bopo" typeface="Microsoft JhengHei"/>
+        <a:font script="Java" typeface="Javanese Text"/>
+        <a:font script="Lisu" typeface="Segoe UI"/>
+        <a:font script="Mymr" typeface="Myanmar Text"/>
+        <a:font script="Nkoo" typeface="Ebrima"/>
+        <a:font script="Olck" typeface="Nirmala UI"/>
+        <a:font script="Osma" typeface="Ebrima"/>
+        <a:font script="Phag" typeface="Phagspa"/>
+        <a:font script="Syrn" typeface="Estrangelo Edessa"/>
+        <a:font script="Syrj" typeface="Estrangelo Edessa"/>
+        <a:font script="Syre" typeface="Estrangelo Edessa"/>
+        <a:font script="Sora" typeface="Nirmala UI"/>
+        <a:font script="Tale" typeface="Microsoft Tai Le"/>
+        <a:font script="Talu" typeface="Microsoft New Tai Lue"/>
+        <a:font script="Tfng" typeface="Ebrima"/>
       </a:minorFont>
     </a:fontScheme>
     <a:fmtScheme name="Office">
